--- a/gyeongsan/GSJOB2_3교시_강의_이력서_자기소개서_면접.pptx
+++ b/gyeongsan/GSJOB2_3교시_강의_이력서_자기소개서_면접.pptx
@@ -7910,7 +7910,7 @@
                 <a:ea typeface="Pretendard"/>
                 <a:cs typeface="Pretendard"/>
               </a:rPr>
-              <a:t>답변 예시 · 최정우(가명, 52)</a:t>
+              <a:t>답변 예시 · 김서연(가명, 24)</a:t>
             </a:r>
           </a:p>
         </p:txBody>
@@ -7951,7 +7951,7 @@
                 <a:ea typeface="Pretendard"/>
                 <a:cs typeface="Pretendard"/>
               </a:rPr>
-              <a:t>「업종이 다른데 잘할 수 있겠습니까?」</a:t>
+              <a:t>「경력이 없는데 이 일을 잘할 수 있겠습니까?」</a:t>
             </a:r>
           </a:p>
         </p:txBody>
@@ -8125,7 +8125,7 @@
                 <a:ea typeface="Pretendard"/>
                 <a:cs typeface="Pretendard"/>
               </a:rPr>
-              <a:t>네, 물류관리와 겹치는 일을 22년 해 왔습니다</a:t>
+              <a:t>네, 수업과 현장 아르바이트로 물류 흐름을 직접 겪었습니다</a:t>
             </a:r>
           </a:p>
         </p:txBody>
@@ -8269,7 +8269,7 @@
                 <a:ea typeface="Pretendard"/>
                 <a:cs typeface="Pretendard"/>
               </a:rPr>
-              <a:t>납기 · 출고 · 재고 관리가 제 일의 중심이었습니다</a:t>
+              <a:t>유통관리 · 생산운영관리에서 재고와 입출고를 배웠습니다</a:t>
             </a:r>
           </a:p>
         </p:txBody>
@@ -8413,7 +8413,7 @@
                 <a:ea typeface="Pretendard"/>
                 <a:cs typeface="Pretendard"/>
               </a:rPr>
-              <a:t>거래처 40여 곳의 납기를 조율하며 출고 일정을 맞췄습니다</a:t>
+              <a:t>물류센터에서 입고 수량 차이를 찾아 바로 보고했습니다</a:t>
             </a:r>
           </a:p>
         </p:txBody>
@@ -8557,7 +8557,7 @@
                 <a:ea typeface="Pretendard"/>
                 <a:cs typeface="Pretendard"/>
               </a:rPr>
-              <a:t>전산 시스템을 빨리 익혀 일정 관리를 맡겠습니다</a:t>
+              <a:t>전산 시스템을 빨리 익혀 입출고 일정을 맡겠습니다</a:t>
             </a:r>
           </a:p>
         </p:txBody>
@@ -8632,7 +8632,7 @@
                 <a:ea typeface="Pretendard"/>
                 <a:cs typeface="Pretendard"/>
               </a:rPr>
-              <a:t>나이 · 업종 질문은 피하지 말고 「겹치는 일」로 답합니다</a:t>
+              <a:t>경력 · 전공 질문은 피하지 말고 「이미 해 본 일」로 답합니다</a:t>
             </a:r>
           </a:p>
         </p:txBody>
@@ -15237,7 +15237,7 @@
                 <a:ea typeface="Pretendard"/>
                 <a:cs typeface="Pretendard"/>
               </a:rPr>
-              <a:t>같은 경험, 다른 문장 · 최정우(가명, 52)</a:t>
+              <a:t>같은 경험, 다른 문장 · 김서연(가명, 24)</a:t>
             </a:r>
           </a:p>
         </p:txBody>
@@ -15278,7 +15278,7 @@
                 <a:ea typeface="Pretendard"/>
                 <a:cs typeface="Pretendard"/>
               </a:rPr>
-              <a:t>담당 업무 나열과 성과 문장</a:t>
+              <a:t>경험 나열과 성과 문장</a:t>
             </a:r>
           </a:p>
         </p:txBody>
@@ -15495,7 +15495,7 @@
                 <a:ea typeface="Pretendard"/>
                 <a:cs typeface="Pretendard"/>
               </a:rPr>
-              <a:t>영업관리 업무 담당</a:t>
+              <a:t>물류센터 아르바이트</a:t>
             </a:r>
           </a:p>
         </p:txBody>
@@ -15566,7 +15566,7 @@
                 <a:ea typeface="Pretendard"/>
                 <a:cs typeface="Pretendard"/>
               </a:rPr>
-              <a:t>거래처 관리</a:t>
+              <a:t>학생회 총무</a:t>
             </a:r>
           </a:p>
         </p:txBody>
@@ -15637,7 +15637,7 @@
                 <a:ea typeface="Pretendard"/>
                 <a:cs typeface="Pretendard"/>
               </a:rPr>
-              <a:t>후배 직원 지도</a:t>
+              <a:t>카페 아르바이트</a:t>
             </a:r>
           </a:p>
         </p:txBody>
@@ -15824,7 +15824,7 @@
                 <a:ea typeface="Pretendard"/>
                 <a:cs typeface="Pretendard"/>
               </a:rPr>
-              <a:t>거래처 40여 곳 납기를 조율해 출고 일정을 맞춤</a:t>
+              <a:t>입고 수량을 검수해 차이를 바로 보고</a:t>
             </a:r>
           </a:p>
         </p:txBody>
@@ -15895,7 +15895,7 @@
                 <a:ea typeface="Pretendard"/>
                 <a:cs typeface="Pretendard"/>
               </a:rPr>
-              <a:t>주문 · 출고 · 재고를 매주 정리해 공장과 공유</a:t>
+              <a:t>행사 예산을 엑셀로 정리해 영수증과 맞춤</a:t>
             </a:r>
           </a:p>
         </p:txBody>
@@ -15966,7 +15966,7 @@
                 <a:ea typeface="Pretendard"/>
                 <a:cs typeface="Pretendard"/>
               </a:rPr>
-              <a:t>클레임 원인을 확인하고 재발 방지안 작성</a:t>
+              <a:t>재고 점검 · 발주와 마감 정산을 맡음</a:t>
             </a:r>
           </a:p>
         </p:txBody>
@@ -18061,7 +18061,7 @@
                 <a:ea typeface="Pretendard"/>
                 <a:cs typeface="Pretendard"/>
               </a:rPr>
-              <a:t>공백기 · 경력 전환</a:t>
+              <a:t>공백기 · 경력이 없는 졸업예정</a:t>
             </a:r>
           </a:p>
         </p:txBody>
@@ -18173,7 +18173,7 @@
                 <a:ea typeface="Pretendard"/>
                 <a:cs typeface="Pretendard"/>
               </a:rPr>
-              <a:t>박하늘(가명, 28) · 8개월 공백</a:t>
+              <a:t>박하늘(가명, 28) · 졸업 뒤 8개월</a:t>
             </a:r>
           </a:p>
         </p:txBody>
@@ -18214,7 +18214,7 @@
                 <a:ea typeface="Pretendard"/>
                 <a:cs typeface="Pretendard"/>
               </a:rPr>
-              <a:t>품질관리 사원 지원</a:t>
+              <a:t>기계과 → 품질관리 사원</a:t>
             </a:r>
           </a:p>
         </p:txBody>
@@ -18502,7 +18502,7 @@
                 <a:ea typeface="Pretendard"/>
                 <a:cs typeface="Pretendard"/>
               </a:rPr>
-              <a:t>최정우(가명, 52) · 업종 전환</a:t>
+              <a:t>김서연(가명, 24) · 경력 없는 졸업예정</a:t>
             </a:r>
           </a:p>
         </p:txBody>
@@ -18543,7 +18543,7 @@
                 <a:ea typeface="Pretendard"/>
                 <a:cs typeface="Pretendard"/>
               </a:rPr>
-              <a:t>물류관리 사무원 지원</a:t>
+              <a:t>경영학과 → 물류관리 사무원</a:t>
             </a:r>
           </a:p>
         </p:txBody>
@@ -18648,7 +18648,7 @@
                 <a:ea typeface="Pretendard"/>
                 <a:cs typeface="Pretendard"/>
               </a:rPr>
-              <a:t>회사 이전으로 퇴직, 경산에 계속 거주</a:t>
+              <a:t>유통관리 수업과 재고 회전 분석 과제</a:t>
             </a:r>
           </a:p>
         </p:txBody>
@@ -18719,7 +18719,7 @@
                 <a:ea typeface="Pretendard"/>
                 <a:cs typeface="Pretendard"/>
               </a:rPr>
-              <a:t>납기 · 출고 · 재고 관리는 물류와 같은 일</a:t>
+              <a:t>물류센터 아르바이트로 입고 검수를 겪음</a:t>
             </a:r>
           </a:p>
         </p:txBody>
@@ -18790,7 +18790,7 @@
                 <a:ea typeface="Pretendard"/>
                 <a:cs typeface="Pretendard"/>
               </a:rPr>
-              <a:t>그래서 업종이 달라도 바로 쓸 수 있음</a:t>
+              <a:t>그래서 신입이어도 흐름을 압니다</a:t>
             </a:r>
           </a:p>
         </p:txBody>

--- a/gyeongsan/GSJOB2_3교시_강의_이력서_자기소개서_면접.pptx
+++ b/gyeongsan/GSJOB2_3교시_강의_이력서_자기소개서_면접.pptx
@@ -3121,7 +3121,7 @@
             <a:avLst/>
           </a:prstGeom>
           <a:solidFill>
-            <a:srgbClr val="F1F7F5"/>
+            <a:srgbClr val="F2F5F9"/>
           </a:solidFill>
           <a:ln>
             <a:noFill/>
@@ -3241,7 +3241,7 @@
             <a:avLst/>
           </a:prstGeom>
           <a:solidFill>
-            <a:srgbClr val="EEF5F2"/>
+            <a:srgbClr val="EFF3F8"/>
           </a:solidFill>
           <a:ln>
             <a:noFill/>
@@ -3331,7 +3331,7 @@
             <a:avLst/>
           </a:prstGeom>
           <a:solidFill>
-            <a:srgbClr val="E1EEE9"/>
+            <a:srgbClr val="E3EAF3"/>
           </a:solidFill>
           <a:ln>
             <a:noFill/>
@@ -3436,7 +3436,7 @@
             <a:r>
               <a:rPr sz="2400" b="1" spc="120">
                 <a:solidFill>
-                  <a:srgbClr val="1E7F5B"/>
+                  <a:srgbClr val="2B5FA8"/>
                 </a:solidFill>
                 <a:latin typeface="Pretendard"/>
                 <a:ea typeface="Pretendard"/>
@@ -3639,7 +3639,7 @@
             <a:avLst/>
           </a:prstGeom>
           <a:solidFill>
-            <a:srgbClr val="F3F8F6"/>
+            <a:srgbClr val="F4F7FA"/>
           </a:solidFill>
           <a:ln>
             <a:noFill/>
@@ -3744,7 +3744,7 @@
             <a:r>
               <a:rPr sz="1950" b="1" spc="160">
                 <a:solidFill>
-                  <a:srgbClr val="1E7F5B"/>
+                  <a:srgbClr val="2B5FA8"/>
                 </a:solidFill>
                 <a:latin typeface="Pretendard"/>
                 <a:ea typeface="Pretendard"/>
@@ -3875,7 +3875,7 @@
             <a:avLst/>
           </a:prstGeom>
           <a:solidFill>
-            <a:srgbClr val="1E7F5B"/>
+            <a:srgbClr val="2B5FA8"/>
           </a:solidFill>
           <a:ln>
             <a:noFill/>
@@ -4060,7 +4060,7 @@
             <a:avLst/>
           </a:prstGeom>
           <a:solidFill>
-            <a:srgbClr val="1E7F5B"/>
+            <a:srgbClr val="2B5FA8"/>
           </a:solidFill>
           <a:ln>
             <a:noFill/>
@@ -4245,7 +4245,7 @@
             <a:avLst/>
           </a:prstGeom>
           <a:solidFill>
-            <a:srgbClr val="1E7F5B"/>
+            <a:srgbClr val="2B5FA8"/>
           </a:solidFill>
           <a:ln>
             <a:noFill/>
@@ -4430,7 +4430,7 @@
             <a:avLst/>
           </a:prstGeom>
           <a:solidFill>
-            <a:srgbClr val="1E7F5B"/>
+            <a:srgbClr val="2B5FA8"/>
           </a:solidFill>
           <a:ln>
             <a:noFill/>
@@ -4711,7 +4711,7 @@
             <a:avLst/>
           </a:prstGeom>
           <a:solidFill>
-            <a:srgbClr val="F3F8F6"/>
+            <a:srgbClr val="F4F7FA"/>
           </a:solidFill>
           <a:ln>
             <a:noFill/>
@@ -4816,7 +4816,7 @@
             <a:r>
               <a:rPr sz="1950" b="1" spc="160">
                 <a:solidFill>
-                  <a:srgbClr val="1E7F5B"/>
+                  <a:srgbClr val="2B5FA8"/>
                 </a:solidFill>
                 <a:latin typeface="Pretendard"/>
                 <a:ea typeface="Pretendard"/>
@@ -5693,7 +5693,7 @@
             <a:avLst/>
           </a:prstGeom>
           <a:solidFill>
-            <a:srgbClr val="F3F8F6"/>
+            <a:srgbClr val="F4F7FA"/>
           </a:solidFill>
           <a:ln>
             <a:noFill/>
@@ -5785,7 +5785,7 @@
             </a:avLst>
           </a:prstGeom>
           <a:solidFill>
-            <a:srgbClr val="1E7F5B"/>
+            <a:srgbClr val="2B5FA8"/>
           </a:solidFill>
           <a:ln>
             <a:noFill/>
@@ -5901,7 +5901,7 @@
             <a:r>
               <a:rPr sz="1950" b="1" spc="160">
                 <a:solidFill>
-                  <a:srgbClr val="1E7F5B"/>
+                  <a:srgbClr val="2B5FA8"/>
                 </a:solidFill>
                 <a:latin typeface="Pretendard"/>
                 <a:ea typeface="Pretendard"/>
@@ -6013,7 +6013,7 @@
             <a:r>
               <a:rPr sz="2250" b="1">
                 <a:solidFill>
-                  <a:srgbClr val="1E7F5B"/>
+                  <a:srgbClr val="2B5FA8"/>
                 </a:solidFill>
                 <a:latin typeface="Pretendard"/>
                 <a:ea typeface="Pretendard"/>
@@ -6185,7 +6185,7 @@
             <a:avLst/>
           </a:prstGeom>
           <a:solidFill>
-            <a:srgbClr val="1E7F5B"/>
+            <a:srgbClr val="2B5FA8"/>
           </a:solidFill>
           <a:ln>
             <a:noFill/>
@@ -6230,7 +6230,7 @@
             <a:r>
               <a:rPr sz="1875" b="1" spc="150">
                 <a:solidFill>
-                  <a:srgbClr val="1E7F5B"/>
+                  <a:srgbClr val="2B5FA8"/>
                 </a:solidFill>
                 <a:latin typeface="Pretendard"/>
                 <a:ea typeface="Pretendard"/>
@@ -6427,7 +6427,7 @@
             <a:avLst/>
           </a:prstGeom>
           <a:solidFill>
-            <a:srgbClr val="F3F8F6"/>
+            <a:srgbClr val="F4F7FA"/>
           </a:solidFill>
           <a:ln>
             <a:noFill/>
@@ -6532,7 +6532,7 @@
             <a:r>
               <a:rPr sz="2400" b="1">
                 <a:solidFill>
-                  <a:srgbClr val="1E7F5B"/>
+                  <a:srgbClr val="2B5FA8"/>
                 </a:solidFill>
                 <a:latin typeface="Pretendard"/>
                 <a:ea typeface="Pretendard"/>
@@ -6770,7 +6770,7 @@
             <a:avLst/>
           </a:prstGeom>
           <a:solidFill>
-            <a:srgbClr val="F3F8F6"/>
+            <a:srgbClr val="F4F7FA"/>
           </a:solidFill>
           <a:ln>
             <a:noFill/>
@@ -6875,7 +6875,7 @@
             <a:r>
               <a:rPr sz="1950" b="1" spc="160">
                 <a:solidFill>
-                  <a:srgbClr val="1E7F5B"/>
+                  <a:srgbClr val="2B5FA8"/>
                 </a:solidFill>
                 <a:latin typeface="Pretendard"/>
                 <a:ea typeface="Pretendard"/>
@@ -7211,7 +7211,7 @@
             <a:avLst/>
           </a:prstGeom>
           <a:solidFill>
-            <a:srgbClr val="1E7F5B"/>
+            <a:srgbClr val="2B5FA8"/>
           </a:solidFill>
           <a:ln>
             <a:noFill/>
@@ -7539,7 +7539,7 @@
             <a:avLst/>
           </a:prstGeom>
           <a:solidFill>
-            <a:srgbClr val="1E7F5B"/>
+            <a:srgbClr val="2B5FA8"/>
           </a:solidFill>
           <a:ln>
             <a:noFill/>
@@ -7799,7 +7799,7 @@
             <a:avLst/>
           </a:prstGeom>
           <a:solidFill>
-            <a:srgbClr val="F3F8F6"/>
+            <a:srgbClr val="F4F7FA"/>
           </a:solidFill>
           <a:ln>
             <a:noFill/>
@@ -7904,7 +7904,7 @@
             <a:r>
               <a:rPr sz="1950" b="1" spc="160">
                 <a:solidFill>
-                  <a:srgbClr val="1E7F5B"/>
+                  <a:srgbClr val="2B5FA8"/>
                 </a:solidFill>
                 <a:latin typeface="Pretendard"/>
                 <a:ea typeface="Pretendard"/>
@@ -8579,11 +8579,11 @@
             </a:avLst>
           </a:prstGeom>
           <a:solidFill>
-            <a:srgbClr val="E6F4EE"/>
+            <a:srgbClr val="EAF0F8"/>
           </a:solidFill>
           <a:ln w="9525">
             <a:solidFill>
-              <a:srgbClr val="C3E6D8"/>
+              <a:srgbClr val="C9DAF2"/>
             </a:solidFill>
           </a:ln>
           <a:effectLst/>
@@ -8782,7 +8782,7 @@
             <a:avLst/>
           </a:prstGeom>
           <a:solidFill>
-            <a:srgbClr val="F3F8F6"/>
+            <a:srgbClr val="F4F7FA"/>
           </a:solidFill>
           <a:ln>
             <a:noFill/>
@@ -8874,7 +8874,7 @@
             </a:avLst>
           </a:prstGeom>
           <a:solidFill>
-            <a:srgbClr val="1E7F5B"/>
+            <a:srgbClr val="2B5FA8"/>
           </a:solidFill>
           <a:ln>
             <a:noFill/>
@@ -8990,7 +8990,7 @@
             <a:r>
               <a:rPr sz="1950" b="1" spc="160">
                 <a:solidFill>
-                  <a:srgbClr val="1E7F5B"/>
+                  <a:srgbClr val="2B5FA8"/>
                 </a:solidFill>
                 <a:latin typeface="Pretendard"/>
                 <a:ea typeface="Pretendard"/>
@@ -9102,7 +9102,7 @@
             <a:r>
               <a:rPr sz="2250" b="1">
                 <a:solidFill>
-                  <a:srgbClr val="1E7F5B"/>
+                  <a:srgbClr val="2B5FA8"/>
                 </a:solidFill>
                 <a:latin typeface="Pretendard"/>
                 <a:ea typeface="Pretendard"/>
@@ -9274,7 +9274,7 @@
             <a:avLst/>
           </a:prstGeom>
           <a:solidFill>
-            <a:srgbClr val="1E7F5B"/>
+            <a:srgbClr val="2B5FA8"/>
           </a:solidFill>
           <a:ln>
             <a:noFill/>
@@ -9319,7 +9319,7 @@
             <a:r>
               <a:rPr sz="1875" b="1" spc="150">
                 <a:solidFill>
-                  <a:srgbClr val="1E7F5B"/>
+                  <a:srgbClr val="2B5FA8"/>
                 </a:solidFill>
                 <a:latin typeface="Pretendard"/>
                 <a:ea typeface="Pretendard"/>
@@ -9516,7 +9516,7 @@
             <a:avLst/>
           </a:prstGeom>
           <a:solidFill>
-            <a:srgbClr val="F3F8F6"/>
+            <a:srgbClr val="F4F7FA"/>
           </a:solidFill>
           <a:ln>
             <a:noFill/>
@@ -9608,7 +9608,7 @@
             </a:avLst>
           </a:prstGeom>
           <a:solidFill>
-            <a:srgbClr val="1E7F5B"/>
+            <a:srgbClr val="2B5FA8"/>
           </a:solidFill>
           <a:ln>
             <a:noFill/>
@@ -9724,7 +9724,7 @@
             <a:r>
               <a:rPr sz="1950" b="1" spc="160">
                 <a:solidFill>
-                  <a:srgbClr val="1E7F5B"/>
+                  <a:srgbClr val="2B5FA8"/>
                 </a:solidFill>
                 <a:latin typeface="Pretendard"/>
                 <a:ea typeface="Pretendard"/>
@@ -10513,7 +10513,7 @@
             <a:avLst/>
           </a:prstGeom>
           <a:solidFill>
-            <a:srgbClr val="C3E6D8"/>
+            <a:srgbClr val="C9DAF2"/>
           </a:solidFill>
           <a:ln>
             <a:noFill/>
@@ -10714,7 +10714,7 @@
             <a:avLst/>
           </a:prstGeom>
           <a:solidFill>
-            <a:srgbClr val="F3F8F6"/>
+            <a:srgbClr val="F4F7FA"/>
           </a:solidFill>
           <a:ln>
             <a:noFill/>
@@ -10819,7 +10819,7 @@
             <a:r>
               <a:rPr sz="1950" b="1" spc="160">
                 <a:solidFill>
-                  <a:srgbClr val="1E7F5B"/>
+                  <a:srgbClr val="2B5FA8"/>
                 </a:solidFill>
                 <a:latin typeface="Pretendard"/>
                 <a:ea typeface="Pretendard"/>
@@ -11591,7 +11591,7 @@
             <a:avLst/>
           </a:prstGeom>
           <a:solidFill>
-            <a:srgbClr val="F3F8F6"/>
+            <a:srgbClr val="F4F7FA"/>
           </a:solidFill>
           <a:ln>
             <a:noFill/>
@@ -11696,7 +11696,7 @@
             <a:r>
               <a:rPr sz="2400" b="1">
                 <a:solidFill>
-                  <a:srgbClr val="1E7F5B"/>
+                  <a:srgbClr val="2B5FA8"/>
                 </a:solidFill>
                 <a:latin typeface="Pretendard"/>
                 <a:ea typeface="Pretendard"/>
@@ -11853,7 +11853,7 @@
             <a:r>
               <a:rPr sz="2475" b="1">
                 <a:solidFill>
-                  <a:srgbClr val="1E7F5B"/>
+                  <a:srgbClr val="2B5FA8"/>
                 </a:solidFill>
                 <a:latin typeface="Pretendard"/>
                 <a:ea typeface="Pretendard"/>
@@ -11969,7 +11969,7 @@
             <a:r>
               <a:rPr sz="2475" b="1">
                 <a:solidFill>
-                  <a:srgbClr val="1E7F5B"/>
+                  <a:srgbClr val="2B5FA8"/>
                 </a:solidFill>
                 <a:latin typeface="Pretendard"/>
                 <a:ea typeface="Pretendard"/>
@@ -12085,7 +12085,7 @@
             <a:r>
               <a:rPr sz="2475" b="1">
                 <a:solidFill>
-                  <a:srgbClr val="1E7F5B"/>
+                  <a:srgbClr val="2B5FA8"/>
                 </a:solidFill>
                 <a:latin typeface="Pretendard"/>
                 <a:ea typeface="Pretendard"/>
@@ -12201,7 +12201,7 @@
             <a:r>
               <a:rPr sz="2475" b="1">
                 <a:solidFill>
-                  <a:srgbClr val="1E7F5B"/>
+                  <a:srgbClr val="2B5FA8"/>
                 </a:solidFill>
                 <a:latin typeface="Pretendard"/>
                 <a:ea typeface="Pretendard"/>
@@ -12268,7 +12268,7 @@
             <a:avLst/>
           </a:prstGeom>
           <a:solidFill>
-            <a:srgbClr val="1E7F5B"/>
+            <a:srgbClr val="2B5FA8"/>
           </a:solidFill>
           <a:ln>
             <a:noFill/>
@@ -12313,7 +12313,7 @@
             <a:r>
               <a:rPr sz="1800" b="1" spc="140">
                 <a:solidFill>
-                  <a:srgbClr val="1E7F5B"/>
+                  <a:srgbClr val="2B5FA8"/>
                 </a:solidFill>
                 <a:latin typeface="Pretendard"/>
                 <a:ea typeface="Pretendard"/>
@@ -12398,7 +12398,7 @@
             <a:avLst/>
           </a:prstGeom>
           <a:solidFill>
-            <a:srgbClr val="F3F8F6"/>
+            <a:srgbClr val="F4F7FA"/>
           </a:solidFill>
           <a:ln>
             <a:noFill/>
@@ -12503,7 +12503,7 @@
             <a:r>
               <a:rPr sz="1950" b="1" spc="160">
                 <a:solidFill>
-                  <a:srgbClr val="1E7F5B"/>
+                  <a:srgbClr val="2B5FA8"/>
                 </a:solidFill>
                 <a:latin typeface="Pretendard"/>
                 <a:ea typeface="Pretendard"/>
@@ -12600,7 +12600,7 @@
             <a:avLst/>
           </a:prstGeom>
           <a:solidFill>
-            <a:srgbClr val="C3E6D8"/>
+            <a:srgbClr val="C9DAF2"/>
           </a:solidFill>
           <a:ln>
             <a:noFill/>
@@ -12645,7 +12645,7 @@
             <a:r>
               <a:rPr sz="1950" b="1">
                 <a:solidFill>
-                  <a:srgbClr val="1E7F5B"/>
+                  <a:srgbClr val="2B5FA8"/>
                 </a:solidFill>
                 <a:latin typeface="Pretendard"/>
                 <a:ea typeface="Pretendard"/>
@@ -12671,7 +12671,7 @@
             <a:avLst/>
           </a:prstGeom>
           <a:solidFill>
-            <a:srgbClr val="1E7F5B"/>
+            <a:srgbClr val="2B5FA8"/>
           </a:solidFill>
           <a:ln>
             <a:noFill/>
@@ -12821,7 +12821,7 @@
             <a:r>
               <a:rPr sz="1500" b="1" spc="120">
                 <a:solidFill>
-                  <a:srgbClr val="1E7F5B"/>
+                  <a:srgbClr val="2B5FA8"/>
                 </a:solidFill>
                 <a:latin typeface="Pretendard"/>
                 <a:ea typeface="Pretendard"/>
@@ -12903,7 +12903,7 @@
             <a:r>
               <a:rPr sz="1950" b="1">
                 <a:solidFill>
-                  <a:srgbClr val="1E7F5B"/>
+                  <a:srgbClr val="2B5FA8"/>
                 </a:solidFill>
                 <a:latin typeface="Pretendard"/>
                 <a:ea typeface="Pretendard"/>
@@ -12929,7 +12929,7 @@
             <a:avLst/>
           </a:prstGeom>
           <a:solidFill>
-            <a:srgbClr val="1E7F5B"/>
+            <a:srgbClr val="2B5FA8"/>
           </a:solidFill>
           <a:ln>
             <a:noFill/>
@@ -13079,7 +13079,7 @@
             <a:r>
               <a:rPr sz="1500" b="1" spc="120">
                 <a:solidFill>
-                  <a:srgbClr val="1E7F5B"/>
+                  <a:srgbClr val="2B5FA8"/>
                 </a:solidFill>
                 <a:latin typeface="Pretendard"/>
                 <a:ea typeface="Pretendard"/>
@@ -13219,7 +13219,7 @@
             </a:avLst>
           </a:prstGeom>
           <a:solidFill>
-            <a:srgbClr val="E6F4EE"/>
+            <a:srgbClr val="EAF0F8"/>
           </a:solidFill>
           <a:ln w="19050">
             <a:solidFill>
@@ -13337,7 +13337,7 @@
             <a:r>
               <a:rPr sz="1500" b="1" spc="120">
                 <a:solidFill>
-                  <a:srgbClr val="1E7F5B"/>
+                  <a:srgbClr val="2B5FA8"/>
                 </a:solidFill>
                 <a:latin typeface="Pretendard"/>
                 <a:ea typeface="Pretendard"/>
@@ -13419,7 +13419,7 @@
             <a:r>
               <a:rPr sz="1950" b="1">
                 <a:solidFill>
-                  <a:srgbClr val="1E7F5B"/>
+                  <a:srgbClr val="2B5FA8"/>
                 </a:solidFill>
                 <a:latin typeface="Pretendard"/>
                 <a:ea typeface="Pretendard"/>
@@ -13445,7 +13445,7 @@
             <a:avLst/>
           </a:prstGeom>
           <a:solidFill>
-            <a:srgbClr val="1E7F5B"/>
+            <a:srgbClr val="2B5FA8"/>
           </a:solidFill>
           <a:ln>
             <a:noFill/>
@@ -13595,7 +13595,7 @@
             <a:r>
               <a:rPr sz="1500" b="1" spc="120">
                 <a:solidFill>
-                  <a:srgbClr val="1E7F5B"/>
+                  <a:srgbClr val="2B5FA8"/>
                 </a:solidFill>
                 <a:latin typeface="Pretendard"/>
                 <a:ea typeface="Pretendard"/>
@@ -13792,7 +13792,7 @@
             <a:avLst/>
           </a:prstGeom>
           <a:solidFill>
-            <a:srgbClr val="F3F8F6"/>
+            <a:srgbClr val="F4F7FA"/>
           </a:solidFill>
           <a:ln>
             <a:noFill/>
@@ -13897,7 +13897,7 @@
             <a:r>
               <a:rPr sz="1950" b="1" spc="160">
                 <a:solidFill>
-                  <a:srgbClr val="1E7F5B"/>
+                  <a:srgbClr val="2B5FA8"/>
                 </a:solidFill>
                 <a:latin typeface="Pretendard"/>
                 <a:ea typeface="Pretendard"/>
@@ -14580,11 +14580,11 @@
             </a:avLst>
           </a:prstGeom>
           <a:solidFill>
-            <a:srgbClr val="E6F4EE"/>
+            <a:srgbClr val="EAF0F8"/>
           </a:solidFill>
           <a:ln w="9525">
             <a:solidFill>
-              <a:srgbClr val="C3E6D8"/>
+              <a:srgbClr val="C9DAF2"/>
             </a:solidFill>
           </a:ln>
           <a:effectLst/>
@@ -14783,7 +14783,7 @@
             <a:avLst/>
           </a:prstGeom>
           <a:solidFill>
-            <a:srgbClr val="F3F8F6"/>
+            <a:srgbClr val="F4F7FA"/>
           </a:solidFill>
           <a:ln>
             <a:noFill/>
@@ -14888,7 +14888,7 @@
             <a:r>
               <a:rPr sz="2400" b="1">
                 <a:solidFill>
-                  <a:srgbClr val="1E7F5B"/>
+                  <a:srgbClr val="2B5FA8"/>
                 </a:solidFill>
                 <a:latin typeface="Pretendard"/>
                 <a:ea typeface="Pretendard"/>
@@ -15126,7 +15126,7 @@
             <a:avLst/>
           </a:prstGeom>
           <a:solidFill>
-            <a:srgbClr val="F3F8F6"/>
+            <a:srgbClr val="F4F7FA"/>
           </a:solidFill>
           <a:ln>
             <a:noFill/>
@@ -15231,7 +15231,7 @@
             <a:r>
               <a:rPr sz="1950" b="1" spc="160">
                 <a:solidFill>
-                  <a:srgbClr val="1E7F5B"/>
+                  <a:srgbClr val="2B5FA8"/>
                 </a:solidFill>
                 <a:latin typeface="Pretendard"/>
                 <a:ea typeface="Pretendard"/>
@@ -15444,7 +15444,7 @@
             <a:avLst/>
           </a:prstGeom>
           <a:solidFill>
-            <a:srgbClr val="1E7F5B"/>
+            <a:srgbClr val="2B5FA8"/>
           </a:solidFill>
           <a:ln>
             <a:noFill/>
@@ -15515,7 +15515,7 @@
             <a:avLst/>
           </a:prstGeom>
           <a:solidFill>
-            <a:srgbClr val="1E7F5B"/>
+            <a:srgbClr val="2B5FA8"/>
           </a:solidFill>
           <a:ln>
             <a:noFill/>
@@ -15586,7 +15586,7 @@
             <a:avLst/>
           </a:prstGeom>
           <a:solidFill>
-            <a:srgbClr val="1E7F5B"/>
+            <a:srgbClr val="2B5FA8"/>
           </a:solidFill>
           <a:ln>
             <a:noFill/>
@@ -15773,7 +15773,7 @@
             <a:avLst/>
           </a:prstGeom>
           <a:solidFill>
-            <a:srgbClr val="1E7F5B"/>
+            <a:srgbClr val="2B5FA8"/>
           </a:solidFill>
           <a:ln>
             <a:noFill/>
@@ -15844,7 +15844,7 @@
             <a:avLst/>
           </a:prstGeom>
           <a:solidFill>
-            <a:srgbClr val="1E7F5B"/>
+            <a:srgbClr val="2B5FA8"/>
           </a:solidFill>
           <a:ln>
             <a:noFill/>
@@ -15915,7 +15915,7 @@
             <a:avLst/>
           </a:prstGeom>
           <a:solidFill>
-            <a:srgbClr val="1E7F5B"/>
+            <a:srgbClr val="2B5FA8"/>
           </a:solidFill>
           <a:ln>
             <a:noFill/>
@@ -16187,7 +16187,7 @@
             <a:avLst/>
           </a:prstGeom>
           <a:solidFill>
-            <a:srgbClr val="F3F8F6"/>
+            <a:srgbClr val="F4F7FA"/>
           </a:solidFill>
           <a:ln>
             <a:noFill/>
@@ -16292,7 +16292,7 @@
             <a:r>
               <a:rPr sz="1950" b="1" spc="160">
                 <a:solidFill>
-                  <a:srgbClr val="1E7F5B"/>
+                  <a:srgbClr val="2B5FA8"/>
                 </a:solidFill>
                 <a:latin typeface="Pretendard"/>
                 <a:ea typeface="Pretendard"/>
@@ -16628,7 +16628,7 @@
             <a:avLst/>
           </a:prstGeom>
           <a:solidFill>
-            <a:srgbClr val="1E7F5B"/>
+            <a:srgbClr val="2B5FA8"/>
           </a:solidFill>
           <a:ln>
             <a:noFill/>
@@ -16956,7 +16956,7 @@
             <a:avLst/>
           </a:prstGeom>
           <a:solidFill>
-            <a:srgbClr val="1E7F5B"/>
+            <a:srgbClr val="2B5FA8"/>
           </a:solidFill>
           <a:ln>
             <a:noFill/>
@@ -17216,7 +17216,7 @@
             <a:avLst/>
           </a:prstGeom>
           <a:solidFill>
-            <a:srgbClr val="F3F8F6"/>
+            <a:srgbClr val="F4F7FA"/>
           </a:solidFill>
           <a:ln>
             <a:noFill/>
@@ -17308,7 +17308,7 @@
             </a:avLst>
           </a:prstGeom>
           <a:solidFill>
-            <a:srgbClr val="1E7F5B"/>
+            <a:srgbClr val="2B5FA8"/>
           </a:solidFill>
           <a:ln>
             <a:noFill/>
@@ -17424,7 +17424,7 @@
             <a:r>
               <a:rPr sz="1950" b="1" spc="160">
                 <a:solidFill>
-                  <a:srgbClr val="1E7F5B"/>
+                  <a:srgbClr val="2B5FA8"/>
                 </a:solidFill>
                 <a:latin typeface="Pretendard"/>
                 <a:ea typeface="Pretendard"/>
@@ -17536,7 +17536,7 @@
             <a:r>
               <a:rPr sz="2250" b="1">
                 <a:solidFill>
-                  <a:srgbClr val="1E7F5B"/>
+                  <a:srgbClr val="2B5FA8"/>
                 </a:solidFill>
                 <a:latin typeface="Pretendard"/>
                 <a:ea typeface="Pretendard"/>
@@ -17708,7 +17708,7 @@
             <a:avLst/>
           </a:prstGeom>
           <a:solidFill>
-            <a:srgbClr val="1E7F5B"/>
+            <a:srgbClr val="2B5FA8"/>
           </a:solidFill>
           <a:ln>
             <a:noFill/>
@@ -17753,7 +17753,7 @@
             <a:r>
               <a:rPr sz="1875" b="1" spc="150">
                 <a:solidFill>
-                  <a:srgbClr val="1E7F5B"/>
+                  <a:srgbClr val="2B5FA8"/>
                 </a:solidFill>
                 <a:latin typeface="Pretendard"/>
                 <a:ea typeface="Pretendard"/>
@@ -17950,7 +17950,7 @@
             <a:avLst/>
           </a:prstGeom>
           <a:solidFill>
-            <a:srgbClr val="F3F8F6"/>
+            <a:srgbClr val="F4F7FA"/>
           </a:solidFill>
           <a:ln>
             <a:noFill/>
@@ -18055,7 +18055,7 @@
             <a:r>
               <a:rPr sz="1950" b="1" spc="160">
                 <a:solidFill>
-                  <a:srgbClr val="1E7F5B"/>
+                  <a:srgbClr val="2B5FA8"/>
                 </a:solidFill>
                 <a:latin typeface="Pretendard"/>
                 <a:ea typeface="Pretendard"/>
@@ -18268,7 +18268,7 @@
             <a:avLst/>
           </a:prstGeom>
           <a:solidFill>
-            <a:srgbClr val="1E7F5B"/>
+            <a:srgbClr val="2B5FA8"/>
           </a:solidFill>
           <a:ln>
             <a:noFill/>
@@ -18339,7 +18339,7 @@
             <a:avLst/>
           </a:prstGeom>
           <a:solidFill>
-            <a:srgbClr val="1E7F5B"/>
+            <a:srgbClr val="2B5FA8"/>
           </a:solidFill>
           <a:ln>
             <a:noFill/>
@@ -18410,7 +18410,7 @@
             <a:avLst/>
           </a:prstGeom>
           <a:solidFill>
-            <a:srgbClr val="1E7F5B"/>
+            <a:srgbClr val="2B5FA8"/>
           </a:solidFill>
           <a:ln>
             <a:noFill/>
@@ -18597,7 +18597,7 @@
             <a:avLst/>
           </a:prstGeom>
           <a:solidFill>
-            <a:srgbClr val="1E7F5B"/>
+            <a:srgbClr val="2B5FA8"/>
           </a:solidFill>
           <a:ln>
             <a:noFill/>
@@ -18668,7 +18668,7 @@
             <a:avLst/>
           </a:prstGeom>
           <a:solidFill>
-            <a:srgbClr val="1E7F5B"/>
+            <a:srgbClr val="2B5FA8"/>
           </a:solidFill>
           <a:ln>
             <a:noFill/>
@@ -18739,7 +18739,7 @@
             <a:avLst/>
           </a:prstGeom>
           <a:solidFill>
-            <a:srgbClr val="1E7F5B"/>
+            <a:srgbClr val="2B5FA8"/>
           </a:solidFill>
           <a:ln>
             <a:noFill/>
@@ -19011,7 +19011,7 @@
             <a:avLst/>
           </a:prstGeom>
           <a:solidFill>
-            <a:srgbClr val="F3F8F6"/>
+            <a:srgbClr val="F4F7FA"/>
           </a:solidFill>
           <a:ln>
             <a:noFill/>
@@ -19116,7 +19116,7 @@
             <a:r>
               <a:rPr sz="2400" b="1">
                 <a:solidFill>
-                  <a:srgbClr val="1E7F5B"/>
+                  <a:srgbClr val="2B5FA8"/>
                 </a:solidFill>
                 <a:latin typeface="Pretendard"/>
                 <a:ea typeface="Pretendard"/>
